--- a/포트폴리오/임수영/포트폴리오.pptx
+++ b/포트폴리오/임수영/포트폴리오.pptx
@@ -3867,7 +3867,7 @@
           <a:p>
             <a:r>
               <a:rPr lang="en-US" altLang="ko-KR" dirty="0"/>
-              <a:t>-C++</a:t>
+              <a:t>-C++20</a:t>
             </a:r>
           </a:p>
           <a:p>
@@ -3913,7 +3913,7 @@
         <p:spPr>
           <a:xfrm>
             <a:off x="7463152" y="4003480"/>
-            <a:ext cx="2151486" cy="2308324"/>
+            <a:ext cx="2151486" cy="2031325"/>
           </a:xfrm>
           <a:prstGeom prst="rect">
             <a:avLst/>
@@ -3948,12 +3948,6 @@
           <a:p>
             <a:r>
               <a:rPr lang="en-US" altLang="ko-KR" dirty="0"/>
-              <a:t>-Select</a:t>
-            </a:r>
-          </a:p>
-          <a:p>
-            <a:r>
-              <a:rPr lang="en-US" altLang="ko-KR" dirty="0"/>
               <a:t>-</a:t>
             </a:r>
             <a:r>
@@ -3977,7 +3971,7 @@
           <a:p>
             <a:r>
               <a:rPr lang="en-US" altLang="ko-KR" dirty="0"/>
-              <a:t>-MSSQL</a:t>
+              <a:t>-MSSQL/ODBC</a:t>
             </a:r>
           </a:p>
           <a:p>

--- a/포트폴리오/임수영/포트폴리오.pptx
+++ b/포트폴리오/임수영/포트폴리오.pptx
@@ -11,7 +11,9 @@
     <p:sldId id="261" r:id="rId5"/>
     <p:sldId id="262" r:id="rId6"/>
     <p:sldId id="263" r:id="rId7"/>
-    <p:sldId id="260" r:id="rId8"/>
+    <p:sldId id="266" r:id="rId8"/>
+    <p:sldId id="265" r:id="rId9"/>
+    <p:sldId id="260" r:id="rId10"/>
   </p:sldIdLst>
   <p:sldSz cx="12192000" cy="6858000"/>
   <p:notesSz cx="6858000" cy="9144000"/>
@@ -265,7 +267,7 @@
           <a:p>
             <a:fld id="{2247377C-5B55-4D7C-924D-76D4776FF1FB}" type="datetimeFigureOut">
               <a:rPr lang="ko-KR" altLang="en-US" smtClean="0"/>
-              <a:t>2026-07-20</a:t>
+              <a:t>2026-08-24</a:t>
             </a:fld>
             <a:endParaRPr lang="ko-KR" altLang="en-US"/>
           </a:p>
@@ -463,7 +465,7 @@
           <a:p>
             <a:fld id="{2247377C-5B55-4D7C-924D-76D4776FF1FB}" type="datetimeFigureOut">
               <a:rPr lang="ko-KR" altLang="en-US" smtClean="0"/>
-              <a:t>2026-07-20</a:t>
+              <a:t>2026-08-24</a:t>
             </a:fld>
             <a:endParaRPr lang="ko-KR" altLang="en-US"/>
           </a:p>
@@ -671,7 +673,7 @@
           <a:p>
             <a:fld id="{2247377C-5B55-4D7C-924D-76D4776FF1FB}" type="datetimeFigureOut">
               <a:rPr lang="ko-KR" altLang="en-US" smtClean="0"/>
-              <a:t>2026-07-20</a:t>
+              <a:t>2026-08-24</a:t>
             </a:fld>
             <a:endParaRPr lang="ko-KR" altLang="en-US"/>
           </a:p>
@@ -869,7 +871,7 @@
           <a:p>
             <a:fld id="{2247377C-5B55-4D7C-924D-76D4776FF1FB}" type="datetimeFigureOut">
               <a:rPr lang="ko-KR" altLang="en-US" smtClean="0"/>
-              <a:t>2026-07-20</a:t>
+              <a:t>2026-08-24</a:t>
             </a:fld>
             <a:endParaRPr lang="ko-KR" altLang="en-US"/>
           </a:p>
@@ -1144,7 +1146,7 @@
           <a:p>
             <a:fld id="{2247377C-5B55-4D7C-924D-76D4776FF1FB}" type="datetimeFigureOut">
               <a:rPr lang="ko-KR" altLang="en-US" smtClean="0"/>
-              <a:t>2026-07-20</a:t>
+              <a:t>2026-08-24</a:t>
             </a:fld>
             <a:endParaRPr lang="ko-KR" altLang="en-US"/>
           </a:p>
@@ -1409,7 +1411,7 @@
           <a:p>
             <a:fld id="{2247377C-5B55-4D7C-924D-76D4776FF1FB}" type="datetimeFigureOut">
               <a:rPr lang="ko-KR" altLang="en-US" smtClean="0"/>
-              <a:t>2026-07-20</a:t>
+              <a:t>2026-08-24</a:t>
             </a:fld>
             <a:endParaRPr lang="ko-KR" altLang="en-US"/>
           </a:p>
@@ -1821,7 +1823,7 @@
           <a:p>
             <a:fld id="{2247377C-5B55-4D7C-924D-76D4776FF1FB}" type="datetimeFigureOut">
               <a:rPr lang="ko-KR" altLang="en-US" smtClean="0"/>
-              <a:t>2026-07-20</a:t>
+              <a:t>2026-08-24</a:t>
             </a:fld>
             <a:endParaRPr lang="ko-KR" altLang="en-US"/>
           </a:p>
@@ -1962,7 +1964,7 @@
           <a:p>
             <a:fld id="{2247377C-5B55-4D7C-924D-76D4776FF1FB}" type="datetimeFigureOut">
               <a:rPr lang="ko-KR" altLang="en-US" smtClean="0"/>
-              <a:t>2026-07-20</a:t>
+              <a:t>2026-08-24</a:t>
             </a:fld>
             <a:endParaRPr lang="ko-KR" altLang="en-US"/>
           </a:p>
@@ -2075,7 +2077,7 @@
           <a:p>
             <a:fld id="{2247377C-5B55-4D7C-924D-76D4776FF1FB}" type="datetimeFigureOut">
               <a:rPr lang="ko-KR" altLang="en-US" smtClean="0"/>
-              <a:t>2026-07-20</a:t>
+              <a:t>2026-08-24</a:t>
             </a:fld>
             <a:endParaRPr lang="ko-KR" altLang="en-US"/>
           </a:p>
@@ -2386,7 +2388,7 @@
           <a:p>
             <a:fld id="{2247377C-5B55-4D7C-924D-76D4776FF1FB}" type="datetimeFigureOut">
               <a:rPr lang="ko-KR" altLang="en-US" smtClean="0"/>
-              <a:t>2026-07-20</a:t>
+              <a:t>2026-08-24</a:t>
             </a:fld>
             <a:endParaRPr lang="ko-KR" altLang="en-US"/>
           </a:p>
@@ -2674,7 +2676,7 @@
           <a:p>
             <a:fld id="{2247377C-5B55-4D7C-924D-76D4776FF1FB}" type="datetimeFigureOut">
               <a:rPr lang="ko-KR" altLang="en-US" smtClean="0"/>
-              <a:t>2026-07-20</a:t>
+              <a:t>2026-08-24</a:t>
             </a:fld>
             <a:endParaRPr lang="ko-KR" altLang="en-US"/>
           </a:p>
@@ -2915,7 +2917,7 @@
           <a:p>
             <a:fld id="{2247377C-5B55-4D7C-924D-76D4776FF1FB}" type="datetimeFigureOut">
               <a:rPr lang="ko-KR" altLang="en-US" smtClean="0"/>
-              <a:t>2026-07-20</a:t>
+              <a:t>2026-08-24</a:t>
             </a:fld>
             <a:endParaRPr lang="ko-KR" altLang="en-US"/>
           </a:p>
@@ -3525,7 +3527,11 @@
             </a:pPr>
             <a:r>
               <a:rPr lang="ko-KR" altLang="en-US" dirty="0"/>
-              <a:t>네트워크 게임 프로그래밍 과제</a:t>
+              <a:t>네트워크 게임 프로그래밍 </a:t>
+            </a:r>
+            <a:r>
+              <a:rPr lang="ko-KR" altLang="en-US" dirty="0" err="1"/>
+              <a:t>텀프로젝트</a:t>
             </a:r>
             <a:endParaRPr lang="en-US" altLang="ko-KR" dirty="0"/>
           </a:p>
@@ -3535,28 +3541,9 @@
             </a:pPr>
             <a:r>
               <a:rPr lang="ko-KR" altLang="en-US" dirty="0"/>
-              <a:t>기타 프로젝트 </a:t>
-            </a:r>
-            <a:r>
-              <a:rPr lang="en-US" altLang="ko-KR" dirty="0"/>
-              <a:t>(</a:t>
-            </a:r>
-            <a:r>
-              <a:rPr lang="ko-KR" altLang="en-US" dirty="0"/>
-              <a:t>마지</a:t>
-            </a:r>
-            <a:r>
-              <a:rPr lang="en-US" altLang="ko-KR" dirty="0"/>
-              <a:t>, 2D </a:t>
-            </a:r>
-            <a:r>
-              <a:rPr lang="ko-KR" altLang="en-US" dirty="0"/>
-              <a:t>게임프로그래밍 과제</a:t>
-            </a:r>
-            <a:r>
-              <a:rPr lang="en-US" altLang="ko-KR" dirty="0"/>
-              <a:t>??)</a:t>
-            </a:r>
+              <a:t>기타 프로젝트</a:t>
+            </a:r>
+            <a:endParaRPr lang="en-US" altLang="ko-KR" dirty="0"/>
           </a:p>
         </p:txBody>
       </p:sp>
@@ -3913,7 +3900,7 @@
         <p:spPr>
           <a:xfrm>
             <a:off x="7463152" y="4003480"/>
-            <a:ext cx="2151486" cy="2031325"/>
+            <a:ext cx="1744388" cy="2031325"/>
           </a:xfrm>
           <a:prstGeom prst="rect">
             <a:avLst/>
@@ -3954,10 +3941,7 @@
               <a:rPr lang="en-US" altLang="ko-KR" dirty="0" err="1"/>
               <a:t>MultiThread</a:t>
             </a:r>
-            <a:r>
-              <a:rPr lang="en-US" altLang="ko-KR" dirty="0"/>
-              <a:t>………..</a:t>
-            </a:r>
+            <a:endParaRPr lang="en-US" altLang="ko-KR" dirty="0"/>
           </a:p>
           <a:p>
             <a:endParaRPr lang="en-US" altLang="ko-KR" dirty="0"/>
@@ -4035,36 +4019,577 @@
           <a:p>
             <a:r>
               <a:rPr lang="ko-KR" altLang="en-US" dirty="0"/>
-              <a:t>졸업작품 소개 적기</a:t>
-            </a:r>
-          </a:p>
-        </p:txBody>
-      </p:sp>
-      <p:sp>
-        <p:nvSpPr>
-          <p:cNvPr id="3" name="내용 개체 틀 2">
-            <a:extLst>
-              <a:ext uri="{FF2B5EF4-FFF2-40B4-BE49-F238E27FC236}">
-                <a16:creationId xmlns:a16="http://schemas.microsoft.com/office/drawing/2014/main" id="{1253F1D3-2124-DFE2-7F05-33C1D86A1C9D}"/>
-              </a:ext>
-            </a:extLst>
-          </p:cNvPr>
-          <p:cNvSpPr>
-            <a:spLocks noGrp="1"/>
-          </p:cNvSpPr>
-          <p:nvPr>
-            <p:ph idx="1"/>
-          </p:nvPr>
-        </p:nvSpPr>
-        <p:spPr/>
-        <p:txBody>
-          <a:bodyPr/>
-          <a:lstStyle/>
-          <a:p>
-            <a:endParaRPr lang="ko-KR" altLang="en-US"/>
-          </a:p>
-        </p:txBody>
-      </p:sp>
+              <a:t>졸업작품</a:t>
+            </a:r>
+          </a:p>
+        </p:txBody>
+      </p:sp>
+      <p:graphicFrame>
+        <p:nvGraphicFramePr>
+          <p:cNvPr id="4" name="표 3">
+            <a:extLst>
+              <a:ext uri="{FF2B5EF4-FFF2-40B4-BE49-F238E27FC236}">
+                <a16:creationId xmlns:a16="http://schemas.microsoft.com/office/drawing/2014/main" id="{652B5D6E-4907-7BCA-F943-523B6261F6B6}"/>
+              </a:ext>
+            </a:extLst>
+          </p:cNvPr>
+          <p:cNvGraphicFramePr>
+            <a:graphicFrameLocks noGrp="1"/>
+          </p:cNvGraphicFramePr>
+          <p:nvPr>
+            <p:extLst>
+              <p:ext uri="{D42A27DB-BD31-4B8C-83A1-F6EECF244321}">
+                <p14:modId xmlns:p14="http://schemas.microsoft.com/office/powerpoint/2010/main" val="416206187"/>
+              </p:ext>
+            </p:extLst>
+          </p:nvPr>
+        </p:nvGraphicFramePr>
+        <p:xfrm>
+          <a:off x="3493654" y="365125"/>
+          <a:ext cx="8128000" cy="6248400"/>
+        </p:xfrm>
+        <a:graphic>
+          <a:graphicData uri="http://schemas.openxmlformats.org/drawingml/2006/table">
+            <a:tbl>
+              <a:tblPr firstRow="1" bandRow="1">
+                <a:tableStyleId>{5940675A-B579-460E-94D1-54222C63F5DA}</a:tableStyleId>
+              </a:tblPr>
+              <a:tblGrid>
+                <a:gridCol w="1810327">
+                  <a:extLst>
+                    <a:ext uri="{9D8B030D-6E8A-4147-A177-3AD203B41FA5}">
+                      <a16:colId xmlns:a16="http://schemas.microsoft.com/office/drawing/2014/main" val="2840878273"/>
+                    </a:ext>
+                  </a:extLst>
+                </a:gridCol>
+                <a:gridCol w="6317673">
+                  <a:extLst>
+                    <a:ext uri="{9D8B030D-6E8A-4147-A177-3AD203B41FA5}">
+                      <a16:colId xmlns:a16="http://schemas.microsoft.com/office/drawing/2014/main" val="3983066521"/>
+                    </a:ext>
+                  </a:extLst>
+                </a:gridCol>
+              </a:tblGrid>
+              <a:tr h="370840">
+                <a:tc>
+                  <a:txBody>
+                    <a:bodyPr/>
+                    <a:lstStyle/>
+                    <a:p>
+                      <a:pPr latinLnBrk="1"/>
+                      <a:r>
+                        <a:rPr lang="ko-KR" altLang="en-US" dirty="0" err="1"/>
+                        <a:t>게임명</a:t>
+                      </a:r>
+                      <a:endParaRPr lang="ko-KR" altLang="en-US" dirty="0"/>
+                    </a:p>
+                  </a:txBody>
+                  <a:tcPr/>
+                </a:tc>
+                <a:tc>
+                  <a:txBody>
+                    <a:bodyPr/>
+                    <a:lstStyle/>
+                    <a:p>
+                      <a:pPr latinLnBrk="1"/>
+                      <a:r>
+                        <a:rPr lang="en-US" altLang="ko-KR" dirty="0" err="1"/>
+                        <a:t>SpaceRobber</a:t>
+                      </a:r>
+                      <a:endParaRPr lang="ko-KR" altLang="en-US" dirty="0"/>
+                    </a:p>
+                  </a:txBody>
+                  <a:tcPr/>
+                </a:tc>
+                <a:extLst>
+                  <a:ext uri="{0D108BD9-81ED-4DB2-BD59-A6C34878D82A}">
+                    <a16:rowId xmlns:a16="http://schemas.microsoft.com/office/drawing/2014/main" val="3765676126"/>
+                  </a:ext>
+                </a:extLst>
+              </a:tr>
+              <a:tr h="370840">
+                <a:tc>
+                  <a:txBody>
+                    <a:bodyPr/>
+                    <a:lstStyle/>
+                    <a:p>
+                      <a:pPr latinLnBrk="1"/>
+                      <a:r>
+                        <a:rPr lang="ko-KR" altLang="en-US" dirty="0"/>
+                        <a:t>게임 장르</a:t>
+                      </a:r>
+                    </a:p>
+                  </a:txBody>
+                  <a:tcPr/>
+                </a:tc>
+                <a:tc>
+                  <a:txBody>
+                    <a:bodyPr/>
+                    <a:lstStyle/>
+                    <a:p>
+                      <a:pPr latinLnBrk="1"/>
+                      <a:r>
+                        <a:rPr lang="en-US" altLang="ko-KR" dirty="0"/>
+                        <a:t>1</a:t>
+                      </a:r>
+                      <a:r>
+                        <a:rPr lang="ko-KR" altLang="en-US" dirty="0"/>
+                        <a:t>인칭 멀티플레이 협동 수집 액션</a:t>
+                      </a:r>
+                    </a:p>
+                  </a:txBody>
+                  <a:tcPr/>
+                </a:tc>
+                <a:extLst>
+                  <a:ext uri="{0D108BD9-81ED-4DB2-BD59-A6C34878D82A}">
+                    <a16:rowId xmlns:a16="http://schemas.microsoft.com/office/drawing/2014/main" val="3710180039"/>
+                  </a:ext>
+                </a:extLst>
+              </a:tr>
+              <a:tr h="370840">
+                <a:tc>
+                  <a:txBody>
+                    <a:bodyPr/>
+                    <a:lstStyle/>
+                    <a:p>
+                      <a:pPr latinLnBrk="1"/>
+                      <a:r>
+                        <a:rPr lang="ko-KR" altLang="en-US" dirty="0"/>
+                        <a:t>개발 기간</a:t>
+                      </a:r>
+                    </a:p>
+                  </a:txBody>
+                  <a:tcPr/>
+                </a:tc>
+                <a:tc>
+                  <a:txBody>
+                    <a:bodyPr/>
+                    <a:lstStyle/>
+                    <a:p>
+                      <a:pPr latinLnBrk="1"/>
+                      <a:r>
+                        <a:rPr lang="en-US" altLang="ko-KR" dirty="0"/>
+                        <a:t>2025.04~2026.06</a:t>
+                      </a:r>
+                    </a:p>
+                    <a:p>
+                      <a:pPr latinLnBrk="1"/>
+                      <a:r>
+                        <a:rPr lang="ko-KR" altLang="en-US" dirty="0"/>
+                        <a:t>추가 수정 기간</a:t>
+                      </a:r>
+                      <a:r>
+                        <a:rPr lang="en-US" altLang="ko-KR" dirty="0"/>
+                        <a:t>: 2026.08~</a:t>
+                      </a:r>
+                      <a:endParaRPr lang="ko-KR" altLang="en-US" dirty="0"/>
+                    </a:p>
+                  </a:txBody>
+                  <a:tcPr/>
+                </a:tc>
+                <a:extLst>
+                  <a:ext uri="{0D108BD9-81ED-4DB2-BD59-A6C34878D82A}">
+                    <a16:rowId xmlns:a16="http://schemas.microsoft.com/office/drawing/2014/main" val="3177747095"/>
+                  </a:ext>
+                </a:extLst>
+              </a:tr>
+              <a:tr h="370840">
+                <a:tc>
+                  <a:txBody>
+                    <a:bodyPr/>
+                    <a:lstStyle/>
+                    <a:p>
+                      <a:pPr latinLnBrk="1"/>
+                      <a:r>
+                        <a:rPr lang="ko-KR" altLang="en-US" dirty="0"/>
+                        <a:t>개발 인원</a:t>
+                      </a:r>
+                    </a:p>
+                  </a:txBody>
+                  <a:tcPr/>
+                </a:tc>
+                <a:tc>
+                  <a:txBody>
+                    <a:bodyPr/>
+                    <a:lstStyle/>
+                    <a:p>
+                      <a:pPr latinLnBrk="1"/>
+                      <a:r>
+                        <a:rPr lang="en-US" altLang="ko-KR" dirty="0"/>
+                        <a:t>3</a:t>
+                      </a:r>
+                      <a:r>
+                        <a:rPr lang="ko-KR" altLang="en-US" dirty="0"/>
+                        <a:t>명 </a:t>
+                      </a:r>
+                      <a:r>
+                        <a:rPr lang="en-US" altLang="ko-KR" dirty="0"/>
+                        <a:t>(</a:t>
+                      </a:r>
+                      <a:r>
+                        <a:rPr lang="ko-KR" altLang="en-US" dirty="0"/>
+                        <a:t>서버</a:t>
+                      </a:r>
+                      <a:r>
+                        <a:rPr lang="en-US" altLang="ko-KR" dirty="0"/>
+                        <a:t>, </a:t>
+                      </a:r>
+                      <a:r>
+                        <a:rPr lang="ko-KR" altLang="en-US" dirty="0"/>
+                        <a:t>클라이언트</a:t>
+                      </a:r>
+                      <a:r>
+                        <a:rPr lang="en-US" altLang="ko-KR" dirty="0"/>
+                        <a:t>, </a:t>
+                      </a:r>
+                      <a:r>
+                        <a:rPr lang="ko-KR" altLang="en-US" dirty="0"/>
+                        <a:t>기획</a:t>
+                      </a:r>
+                      <a:r>
+                        <a:rPr lang="en-US" altLang="ko-KR" dirty="0"/>
+                        <a:t>)</a:t>
+                      </a:r>
+                      <a:endParaRPr lang="ko-KR" altLang="en-US" dirty="0"/>
+                    </a:p>
+                  </a:txBody>
+                  <a:tcPr/>
+                </a:tc>
+                <a:extLst>
+                  <a:ext uri="{0D108BD9-81ED-4DB2-BD59-A6C34878D82A}">
+                    <a16:rowId xmlns:a16="http://schemas.microsoft.com/office/drawing/2014/main" val="2034956738"/>
+                  </a:ext>
+                </a:extLst>
+              </a:tr>
+              <a:tr h="370840">
+                <a:tc>
+                  <a:txBody>
+                    <a:bodyPr/>
+                    <a:lstStyle/>
+                    <a:p>
+                      <a:pPr latinLnBrk="1"/>
+                      <a:r>
+                        <a:rPr lang="ko-KR" altLang="en-US" dirty="0"/>
+                        <a:t>사용 기술</a:t>
+                      </a:r>
+                    </a:p>
+                  </a:txBody>
+                  <a:tcPr/>
+                </a:tc>
+                <a:tc>
+                  <a:txBody>
+                    <a:bodyPr/>
+                    <a:lstStyle/>
+                    <a:p>
+                      <a:pPr latinLnBrk="1"/>
+                      <a:r>
+                        <a:rPr lang="en-US" altLang="ko-KR" dirty="0"/>
+                        <a:t>C++20, IOCP, MSSQL</a:t>
+                      </a:r>
+                      <a:endParaRPr lang="ko-KR" altLang="en-US" dirty="0"/>
+                    </a:p>
+                  </a:txBody>
+                  <a:tcPr/>
+                </a:tc>
+                <a:extLst>
+                  <a:ext uri="{0D108BD9-81ED-4DB2-BD59-A6C34878D82A}">
+                    <a16:rowId xmlns:a16="http://schemas.microsoft.com/office/drawing/2014/main" val="2342659492"/>
+                  </a:ext>
+                </a:extLst>
+              </a:tr>
+              <a:tr h="370840">
+                <a:tc>
+                  <a:txBody>
+                    <a:bodyPr/>
+                    <a:lstStyle/>
+                    <a:p>
+                      <a:pPr latinLnBrk="1"/>
+                      <a:r>
+                        <a:rPr lang="ko-KR" altLang="en-US" dirty="0"/>
+                        <a:t>역할 및 구현 내용</a:t>
+                      </a:r>
+                    </a:p>
+                  </a:txBody>
+                  <a:tcPr/>
+                </a:tc>
+                <a:tc>
+                  <a:txBody>
+                    <a:bodyPr/>
+                    <a:lstStyle/>
+                    <a:p>
+                      <a:pPr latinLnBrk="1"/>
+                      <a:r>
+                        <a:rPr lang="ko-KR" altLang="en-US" dirty="0"/>
+                        <a:t>서버 프로그래머</a:t>
+                      </a:r>
+                      <a:endParaRPr lang="en-US" altLang="ko-KR" dirty="0"/>
+                    </a:p>
+                    <a:p>
+                      <a:pPr latinLnBrk="1"/>
+                      <a:r>
+                        <a:rPr lang="en-US" altLang="ko-KR" dirty="0"/>
+                        <a:t>-</a:t>
+                      </a:r>
+                      <a:r>
+                        <a:rPr lang="ko-KR" altLang="en-US" dirty="0"/>
+                        <a:t>서버 프레임워크 구축</a:t>
+                      </a:r>
+                      <a:endParaRPr lang="en-US" altLang="ko-KR" dirty="0"/>
+                    </a:p>
+                    <a:p>
+                      <a:pPr latinLnBrk="1"/>
+                      <a:r>
+                        <a:rPr lang="en-US" altLang="ko-KR" dirty="0"/>
+                        <a:t>-</a:t>
+                      </a:r>
+                      <a:r>
+                        <a:rPr lang="ko-KR" altLang="en-US" dirty="0"/>
+                        <a:t>클라이언트</a:t>
+                      </a:r>
+                      <a:r>
+                        <a:rPr lang="en-US" altLang="ko-KR" dirty="0"/>
+                        <a:t>/</a:t>
+                      </a:r>
+                      <a:r>
+                        <a:rPr lang="ko-KR" altLang="en-US" dirty="0"/>
+                        <a:t>서버 패킷 송수신 로직</a:t>
+                      </a:r>
+                      <a:endParaRPr lang="en-US" altLang="ko-KR" dirty="0"/>
+                    </a:p>
+                    <a:p>
+                      <a:pPr latinLnBrk="1"/>
+                      <a:r>
+                        <a:rPr lang="en-US" altLang="ko-KR" dirty="0"/>
+                        <a:t>-</a:t>
+                      </a:r>
+                      <a:r>
+                        <a:rPr lang="ko-KR" altLang="en-US" dirty="0"/>
+                        <a:t>플레이어 이동</a:t>
+                      </a:r>
+                      <a:r>
+                        <a:rPr lang="en-US" altLang="ko-KR" dirty="0"/>
+                        <a:t>, </a:t>
+                      </a:r>
+                      <a:r>
+                        <a:rPr lang="ko-KR" altLang="en-US" dirty="0"/>
+                        <a:t>방향</a:t>
+                      </a:r>
+                      <a:r>
+                        <a:rPr lang="en-US" altLang="ko-KR" dirty="0"/>
+                        <a:t>, State </a:t>
+                      </a:r>
+                      <a:r>
+                        <a:rPr lang="ko-KR" altLang="en-US" dirty="0"/>
+                        <a:t>등 각종 동기화 작업</a:t>
+                      </a:r>
+                      <a:endParaRPr lang="en-US" altLang="ko-KR" dirty="0"/>
+                    </a:p>
+                    <a:p>
+                      <a:pPr latinLnBrk="1"/>
+                      <a:r>
+                        <a:rPr lang="en-US" altLang="ko-KR" dirty="0"/>
+                        <a:t>-FSM </a:t>
+                      </a:r>
+                      <a:r>
+                        <a:rPr lang="ko-KR" altLang="en-US" dirty="0"/>
+                        <a:t>기반 몬스터 </a:t>
+                      </a:r>
+                      <a:r>
+                        <a:rPr lang="en-US" altLang="ko-KR" dirty="0"/>
+                        <a:t>AI</a:t>
+                      </a:r>
+                    </a:p>
+                    <a:p>
+                      <a:pPr latinLnBrk="1"/>
+                      <a:r>
+                        <a:rPr lang="en-US" altLang="ko-KR" dirty="0"/>
+                        <a:t>-3</a:t>
+                      </a:r>
+                      <a:r>
+                        <a:rPr lang="ko-KR" altLang="en-US" dirty="0"/>
+                        <a:t>차원 배열을 이용한 </a:t>
+                      </a:r>
+                      <a:r>
+                        <a:rPr lang="en-US" altLang="ko-KR" dirty="0"/>
+                        <a:t>A* </a:t>
+                      </a:r>
+                      <a:r>
+                        <a:rPr lang="ko-KR" altLang="en-US" dirty="0" err="1"/>
+                        <a:t>길찾기</a:t>
+                      </a:r>
+                      <a:r>
+                        <a:rPr lang="ko-KR" altLang="en-US" dirty="0"/>
+                        <a:t> 알고리즘</a:t>
+                      </a:r>
+                      <a:endParaRPr lang="en-US" altLang="ko-KR" dirty="0"/>
+                    </a:p>
+                    <a:p>
+                      <a:pPr latinLnBrk="1"/>
+                      <a:r>
+                        <a:rPr lang="en-US" altLang="ko-KR" dirty="0"/>
+                        <a:t>-</a:t>
+                      </a:r>
+                      <a:r>
+                        <a:rPr lang="ko-KR" altLang="en-US" dirty="0"/>
+                        <a:t>프로토콜 및 패킷 설계</a:t>
+                      </a:r>
+                      <a:endParaRPr lang="en-US" altLang="ko-KR" dirty="0"/>
+                    </a:p>
+                    <a:p>
+                      <a:pPr latinLnBrk="1"/>
+                      <a:r>
+                        <a:rPr lang="en-US" altLang="ko-KR" dirty="0"/>
+                        <a:t>-</a:t>
+                      </a:r>
+                      <a:r>
+                        <a:rPr lang="ko-KR" altLang="en-US" dirty="0"/>
+                        <a:t>랜덤 맵 생성 로직</a:t>
+                      </a:r>
+                      <a:endParaRPr lang="en-US" altLang="ko-KR" dirty="0"/>
+                    </a:p>
+                    <a:p>
+                      <a:pPr latinLnBrk="1"/>
+                      <a:r>
+                        <a:rPr lang="en-US" altLang="ko-KR" dirty="0"/>
+                        <a:t>-</a:t>
+                      </a:r>
+                      <a:r>
+                        <a:rPr lang="ko-KR" altLang="en-US" dirty="0"/>
+                        <a:t>아이템 드랍 및 획득 로직</a:t>
+                      </a:r>
+                      <a:endParaRPr lang="en-US" altLang="ko-KR" dirty="0"/>
+                    </a:p>
+                    <a:p>
+                      <a:pPr latinLnBrk="1"/>
+                      <a:r>
+                        <a:rPr lang="en-US" altLang="ko-KR" dirty="0"/>
+                        <a:t>-</a:t>
+                      </a:r>
+                      <a:r>
+                        <a:rPr lang="ko-KR" altLang="en-US" dirty="0"/>
+                        <a:t>퀘스트 시스템</a:t>
+                      </a:r>
+                      <a:endParaRPr lang="en-US" altLang="ko-KR" dirty="0"/>
+                    </a:p>
+                    <a:p>
+                      <a:pPr latinLnBrk="1"/>
+                      <a:r>
+                        <a:rPr lang="en-US" altLang="ko-KR" dirty="0"/>
+                        <a:t>-</a:t>
+                      </a:r>
+                      <a:r>
+                        <a:rPr lang="ko-KR" altLang="en-US" dirty="0"/>
+                        <a:t>몬스터</a:t>
+                      </a:r>
+                      <a:r>
+                        <a:rPr lang="en-US" altLang="ko-KR" dirty="0"/>
+                        <a:t>/</a:t>
+                      </a:r>
+                      <a:r>
+                        <a:rPr lang="ko-KR" altLang="en-US" dirty="0"/>
+                        <a:t>플레이어 충돌 처리</a:t>
+                      </a:r>
+                      <a:endParaRPr lang="en-US" altLang="ko-KR" dirty="0"/>
+                    </a:p>
+                    <a:p>
+                      <a:pPr latinLnBrk="1"/>
+                      <a:r>
+                        <a:rPr lang="en-US" altLang="ko-KR" dirty="0"/>
+                        <a:t>-DB </a:t>
+                      </a:r>
+                      <a:r>
+                        <a:rPr lang="ko-KR" altLang="en-US" dirty="0"/>
+                        <a:t>연동</a:t>
+                      </a:r>
+                    </a:p>
+                  </a:txBody>
+                  <a:tcPr/>
+                </a:tc>
+                <a:extLst>
+                  <a:ext uri="{0D108BD9-81ED-4DB2-BD59-A6C34878D82A}">
+                    <a16:rowId xmlns:a16="http://schemas.microsoft.com/office/drawing/2014/main" val="4289478093"/>
+                  </a:ext>
+                </a:extLst>
+              </a:tr>
+              <a:tr h="370840">
+                <a:tc>
+                  <a:txBody>
+                    <a:bodyPr/>
+                    <a:lstStyle/>
+                    <a:p>
+                      <a:pPr latinLnBrk="1"/>
+                      <a:r>
+                        <a:rPr lang="en-US" altLang="ko-KR" dirty="0"/>
+                        <a:t>Git</a:t>
+                      </a:r>
+                      <a:endParaRPr lang="ko-KR" altLang="en-US" dirty="0"/>
+                    </a:p>
+                  </a:txBody>
+                  <a:tcPr/>
+                </a:tc>
+                <a:tc>
+                  <a:txBody>
+                    <a:bodyPr/>
+                    <a:lstStyle/>
+                    <a:p>
+                      <a:pPr latinLnBrk="1"/>
+                      <a:r>
+                        <a:rPr lang="en-US" altLang="ko-KR" dirty="0">
+                          <a:hlinkClick r:id="rId2"/>
+                        </a:rPr>
+                        <a:t>https://github.com/kimi5231/B1A2_project.git</a:t>
+                      </a:r>
+                      <a:endParaRPr lang="en-US" altLang="ko-KR" dirty="0"/>
+                    </a:p>
+                  </a:txBody>
+                  <a:tcPr/>
+                </a:tc>
+                <a:extLst>
+                  <a:ext uri="{0D108BD9-81ED-4DB2-BD59-A6C34878D82A}">
+                    <a16:rowId xmlns:a16="http://schemas.microsoft.com/office/drawing/2014/main" val="2634139248"/>
+                  </a:ext>
+                </a:extLst>
+              </a:tr>
+              <a:tr h="370840">
+                <a:tc>
+                  <a:txBody>
+                    <a:bodyPr/>
+                    <a:lstStyle/>
+                    <a:p>
+                      <a:pPr latinLnBrk="1"/>
+                      <a:r>
+                        <a:rPr lang="ko-KR" altLang="en-US" dirty="0"/>
+                        <a:t>시연 영상</a:t>
+                      </a:r>
+                    </a:p>
+                  </a:txBody>
+                  <a:tcPr/>
+                </a:tc>
+                <a:tc>
+                  <a:txBody>
+                    <a:bodyPr/>
+                    <a:lstStyle/>
+                    <a:p>
+                      <a:pPr latinLnBrk="1"/>
+                      <a:r>
+                        <a:rPr lang="ko-KR" altLang="en-US" dirty="0" err="1"/>
+                        <a:t>제작중</a:t>
+                      </a:r>
+                      <a:endParaRPr lang="ko-KR" altLang="en-US" dirty="0"/>
+                    </a:p>
+                  </a:txBody>
+                  <a:tcPr/>
+                </a:tc>
+                <a:extLst>
+                  <a:ext uri="{0D108BD9-81ED-4DB2-BD59-A6C34878D82A}">
+                    <a16:rowId xmlns:a16="http://schemas.microsoft.com/office/drawing/2014/main" val="2941132060"/>
+                  </a:ext>
+                </a:extLst>
+              </a:tr>
+            </a:tbl>
+          </a:graphicData>
+        </a:graphic>
+      </p:graphicFrame>
     </p:spTree>
     <p:extLst>
       <p:ext uri="{BB962C8B-B14F-4D97-AF65-F5344CB8AC3E}">
@@ -4124,13 +4649,16 @@
           <a:p>
             <a:r>
               <a:rPr lang="ko-KR" altLang="en-US" dirty="0"/>
-              <a:t>졸업작품 중요 내용</a:t>
+              <a:t>졸업작품</a:t>
             </a:r>
             <a:r>
               <a:rPr lang="en-US" altLang="ko-KR" dirty="0"/>
-              <a:t>….</a:t>
-            </a:r>
-            <a:endParaRPr lang="ko-KR" altLang="en-US" dirty="0"/>
+              <a:t>:</a:t>
+            </a:r>
+            <a:r>
+              <a:rPr lang="ko-KR" altLang="en-US" dirty="0"/>
+              <a:t> 중요 내용</a:t>
+            </a:r>
           </a:p>
         </p:txBody>
       </p:sp>
@@ -4172,13 +4700,24 @@
           <a:p>
             <a:r>
               <a:rPr lang="ko-KR" altLang="en-US" dirty="0"/>
-              <a:t>성능향상 노력</a:t>
+              <a:t>배열과 </a:t>
+            </a:r>
+            <a:r>
+              <a:rPr lang="en-US" altLang="ko-KR" dirty="0" err="1"/>
+              <a:t>ObjectPoolState</a:t>
+            </a:r>
+            <a:r>
+              <a:rPr lang="ko-KR" altLang="en-US" dirty="0"/>
+              <a:t>를 활용한 </a:t>
             </a:r>
             <a:r>
               <a:rPr lang="en-US" altLang="ko-KR" dirty="0"/>
-              <a:t>…….</a:t>
-            </a:r>
-            <a:endParaRPr lang="ko-KR" altLang="en-US" dirty="0"/>
+              <a:t>Object </a:t>
+            </a:r>
+            <a:r>
+              <a:rPr lang="ko-KR" altLang="en-US" dirty="0"/>
+              <a:t>재사용</a:t>
+            </a:r>
           </a:p>
         </p:txBody>
       </p:sp>
@@ -4241,6 +4780,14 @@
           <a:p>
             <a:r>
               <a:rPr lang="ko-KR" altLang="en-US" dirty="0"/>
+              <a:t>졸업작품</a:t>
+            </a:r>
+            <a:r>
+              <a:rPr lang="en-US" altLang="ko-KR" dirty="0"/>
+              <a:t>: </a:t>
+            </a:r>
+            <a:r>
+              <a:rPr lang="ko-KR" altLang="en-US" dirty="0"/>
               <a:t>기타 구현 내용</a:t>
             </a:r>
           </a:p>
@@ -4290,6 +4837,71 @@
               <a:rPr lang="en-US" altLang="ko-KR" dirty="0"/>
               <a:t>AI</a:t>
             </a:r>
+          </a:p>
+          <a:p>
+            <a:r>
+              <a:rPr lang="en-US" altLang="ko-KR" dirty="0"/>
+              <a:t>3</a:t>
+            </a:r>
+            <a:r>
+              <a:rPr lang="ko-KR" altLang="en-US" dirty="0"/>
+              <a:t>차원 배열을 이용한 </a:t>
+            </a:r>
+            <a:r>
+              <a:rPr lang="en-US" altLang="ko-KR" dirty="0"/>
+              <a:t>A* </a:t>
+            </a:r>
+            <a:r>
+              <a:rPr lang="ko-KR" altLang="en-US" dirty="0" err="1"/>
+              <a:t>길찾기</a:t>
+            </a:r>
+            <a:r>
+              <a:rPr lang="ko-KR" altLang="en-US" dirty="0"/>
+              <a:t> 알고리즘</a:t>
+            </a:r>
+            <a:endParaRPr lang="en-US" altLang="ko-KR" dirty="0"/>
+          </a:p>
+          <a:p>
+            <a:r>
+              <a:rPr lang="ko-KR" altLang="en-US" dirty="0"/>
+              <a:t>랜덤 맵 생성 로직</a:t>
+            </a:r>
+            <a:endParaRPr lang="en-US" altLang="ko-KR" dirty="0"/>
+          </a:p>
+          <a:p>
+            <a:r>
+              <a:rPr lang="ko-KR" altLang="en-US" dirty="0"/>
+              <a:t>아이템 드랍 및 획득 로직</a:t>
+            </a:r>
+            <a:endParaRPr lang="en-US" altLang="ko-KR" dirty="0"/>
+          </a:p>
+          <a:p>
+            <a:r>
+              <a:rPr lang="ko-KR" altLang="en-US" dirty="0"/>
+              <a:t>퀘스트 로직</a:t>
+            </a:r>
+            <a:endParaRPr lang="en-US" altLang="ko-KR" dirty="0"/>
+          </a:p>
+          <a:p>
+            <a:r>
+              <a:rPr lang="ko-KR" altLang="en-US" dirty="0"/>
+              <a:t>몬스터</a:t>
+            </a:r>
+            <a:r>
+              <a:rPr lang="en-US" altLang="ko-KR" dirty="0"/>
+              <a:t>/</a:t>
+            </a:r>
+            <a:r>
+              <a:rPr lang="ko-KR" altLang="en-US" dirty="0"/>
+              <a:t>플레이어 충돌 처리</a:t>
+            </a:r>
+            <a:endParaRPr lang="en-US" altLang="ko-KR" dirty="0"/>
+          </a:p>
+          <a:p>
+            <a:endParaRPr lang="en-US" altLang="ko-KR" dirty="0"/>
+          </a:p>
+          <a:p>
+            <a:endParaRPr lang="en-US" altLang="ko-KR" dirty="0"/>
           </a:p>
           <a:p>
             <a:endParaRPr lang="ko-KR" altLang="en-US" dirty="0"/>
@@ -4310,6 +4922,784 @@
 </file>
 
 <file path=ppt/slides/slide7.xml><?xml version="1.0" encoding="utf-8"?>
+<p:sld xmlns:a="http://schemas.openxmlformats.org/drawingml/2006/main" xmlns:r="http://schemas.openxmlformats.org/officeDocument/2006/relationships" xmlns:p="http://schemas.openxmlformats.org/presentationml/2006/main">
+  <p:cSld>
+    <p:spTree>
+      <p:nvGrpSpPr>
+        <p:cNvPr id="1" name="">
+          <a:extLst>
+            <a:ext uri="{FF2B5EF4-FFF2-40B4-BE49-F238E27FC236}">
+              <a16:creationId xmlns:a16="http://schemas.microsoft.com/office/drawing/2014/main" id="{5DF7F079-D3DC-6465-1D5F-0B1EB1AF9892}"/>
+            </a:ext>
+          </a:extLst>
+        </p:cNvPr>
+        <p:cNvGrpSpPr/>
+        <p:nvPr/>
+      </p:nvGrpSpPr>
+      <p:grpSpPr>
+        <a:xfrm>
+          <a:off x="0" y="0"/>
+          <a:ext cx="0" cy="0"/>
+          <a:chOff x="0" y="0"/>
+          <a:chExt cx="0" cy="0"/>
+        </a:xfrm>
+      </p:grpSpPr>
+      <p:sp>
+        <p:nvSpPr>
+          <p:cNvPr id="2" name="제목 1">
+            <a:extLst>
+              <a:ext uri="{FF2B5EF4-FFF2-40B4-BE49-F238E27FC236}">
+                <a16:creationId xmlns:a16="http://schemas.microsoft.com/office/drawing/2014/main" id="{776B0126-ED97-5998-7495-EA78479842B7}"/>
+              </a:ext>
+            </a:extLst>
+          </p:cNvPr>
+          <p:cNvSpPr>
+            <a:spLocks noGrp="1"/>
+          </p:cNvSpPr>
+          <p:nvPr>
+            <p:ph type="title"/>
+          </p:nvPr>
+        </p:nvSpPr>
+        <p:spPr/>
+        <p:txBody>
+          <a:bodyPr/>
+          <a:lstStyle/>
+          <a:p>
+            <a:r>
+              <a:rPr lang="ko-KR" altLang="en-US" dirty="0"/>
+              <a:t>졸업작품</a:t>
+            </a:r>
+            <a:r>
+              <a:rPr lang="en-US" altLang="ko-KR" dirty="0"/>
+              <a:t>: </a:t>
+            </a:r>
+            <a:r>
+              <a:rPr lang="ko-KR" altLang="en-US" dirty="0"/>
+              <a:t>기타 구현 내용</a:t>
+            </a:r>
+          </a:p>
+        </p:txBody>
+      </p:sp>
+      <p:sp>
+        <p:nvSpPr>
+          <p:cNvPr id="6" name="TextBox 5">
+            <a:extLst>
+              <a:ext uri="{FF2B5EF4-FFF2-40B4-BE49-F238E27FC236}">
+                <a16:creationId xmlns:a16="http://schemas.microsoft.com/office/drawing/2014/main" id="{52E8F879-A3A1-973F-034A-723BD7D14D2E}"/>
+              </a:ext>
+            </a:extLst>
+          </p:cNvPr>
+          <p:cNvSpPr txBox="1"/>
+          <p:nvPr/>
+        </p:nvSpPr>
+        <p:spPr>
+          <a:xfrm>
+            <a:off x="838200" y="1794654"/>
+            <a:ext cx="3297381" cy="923330"/>
+          </a:xfrm>
+          <a:prstGeom prst="rect">
+            <a:avLst/>
+          </a:prstGeom>
+          <a:noFill/>
+        </p:spPr>
+        <p:txBody>
+          <a:bodyPr wrap="square" rtlCol="0">
+            <a:spAutoFit/>
+          </a:bodyPr>
+          <a:lstStyle/>
+          <a:p>
+            <a:pPr marL="342900" indent="-342900">
+              <a:buAutoNum type="arabicPeriod"/>
+            </a:pPr>
+            <a:r>
+              <a:rPr lang="en-US" altLang="ko-KR" dirty="0"/>
+              <a:t>DB </a:t>
+            </a:r>
+            <a:r>
+              <a:rPr lang="ko-KR" altLang="en-US" dirty="0"/>
+              <a:t>쓰레드</a:t>
+            </a:r>
+            <a:endParaRPr lang="en-US" altLang="ko-KR" dirty="0"/>
+          </a:p>
+          <a:p>
+            <a:r>
+              <a:rPr lang="en-US" altLang="ko-KR" sz="1200" dirty="0"/>
+              <a:t>DB</a:t>
+            </a:r>
+            <a:r>
+              <a:rPr lang="ko-KR" altLang="en-US" sz="1200" dirty="0"/>
+              <a:t> 연동 딜레이를 제외하기</a:t>
+            </a:r>
+            <a:r>
+              <a:rPr lang="en-US" altLang="ko-KR" sz="1200" dirty="0"/>
+              <a:t> </a:t>
+            </a:r>
+            <a:r>
+              <a:rPr lang="ko-KR" altLang="en-US" sz="1200" dirty="0"/>
+              <a:t>위해 </a:t>
+            </a:r>
+            <a:r>
+              <a:rPr lang="en-US" altLang="ko-KR" sz="1200" dirty="0"/>
+              <a:t>DB </a:t>
+            </a:r>
+            <a:r>
+              <a:rPr lang="ko-KR" altLang="en-US" sz="1200" dirty="0"/>
+              <a:t>쓰레드를 추가 후</a:t>
+            </a:r>
+            <a:r>
+              <a:rPr lang="en-US" altLang="ko-KR" sz="1200" dirty="0"/>
+              <a:t>, IOCP </a:t>
+            </a:r>
+            <a:r>
+              <a:rPr lang="ko-KR" altLang="en-US" sz="1200" dirty="0"/>
+              <a:t>이벤트를 활용하여 비동기식으로 연동되게 하였다</a:t>
+            </a:r>
+            <a:r>
+              <a:rPr lang="en-US" altLang="ko-KR" sz="1200" dirty="0"/>
+              <a:t>.</a:t>
+            </a:r>
+            <a:endParaRPr lang="ko-KR" altLang="en-US" sz="1200" dirty="0"/>
+          </a:p>
+        </p:txBody>
+      </p:sp>
+      <p:sp>
+        <p:nvSpPr>
+          <p:cNvPr id="8" name="TextBox 7">
+            <a:extLst>
+              <a:ext uri="{FF2B5EF4-FFF2-40B4-BE49-F238E27FC236}">
+                <a16:creationId xmlns:a16="http://schemas.microsoft.com/office/drawing/2014/main" id="{623F51EB-EF8F-49CD-84F4-DF2D80676E45}"/>
+              </a:ext>
+            </a:extLst>
+          </p:cNvPr>
+          <p:cNvSpPr txBox="1"/>
+          <p:nvPr/>
+        </p:nvSpPr>
+        <p:spPr>
+          <a:xfrm>
+            <a:off x="4447309" y="1794654"/>
+            <a:ext cx="3297381" cy="1292662"/>
+          </a:xfrm>
+          <a:prstGeom prst="rect">
+            <a:avLst/>
+          </a:prstGeom>
+          <a:noFill/>
+        </p:spPr>
+        <p:txBody>
+          <a:bodyPr wrap="square" rtlCol="0">
+            <a:spAutoFit/>
+          </a:bodyPr>
+          <a:lstStyle/>
+          <a:p>
+            <a:r>
+              <a:rPr lang="en-US" altLang="ko-KR" dirty="0"/>
+              <a:t>2. FSM</a:t>
+            </a:r>
+            <a:r>
+              <a:rPr lang="ko-KR" altLang="en-US" dirty="0"/>
+              <a:t>을 이용한 몬스터 </a:t>
+            </a:r>
+            <a:r>
+              <a:rPr lang="en-US" altLang="ko-KR" dirty="0"/>
+              <a:t>AI</a:t>
+            </a:r>
+          </a:p>
+          <a:p>
+            <a:r>
+              <a:rPr lang="ko-KR" altLang="en-US" sz="1200" dirty="0"/>
+              <a:t>몬스터마다 </a:t>
+            </a:r>
+            <a:r>
+              <a:rPr lang="en-US" altLang="ko-KR" sz="1200" dirty="0"/>
+              <a:t>FSM </a:t>
+            </a:r>
+            <a:r>
+              <a:rPr lang="ko-KR" altLang="en-US" sz="1200" dirty="0"/>
+              <a:t>클래스를 멤버 변수로 지니게 하여</a:t>
+            </a:r>
+            <a:r>
+              <a:rPr lang="en-US" altLang="ko-KR" sz="1200" dirty="0"/>
+              <a:t>, State </a:t>
+            </a:r>
+            <a:r>
+              <a:rPr lang="ko-KR" altLang="en-US" sz="1200" dirty="0"/>
+              <a:t>전환이 가능하도록 하였다</a:t>
+            </a:r>
+            <a:r>
+              <a:rPr lang="en-US" altLang="ko-KR" sz="1200" dirty="0"/>
+              <a:t>.</a:t>
+            </a:r>
+          </a:p>
+          <a:p>
+            <a:r>
+              <a:rPr lang="ko-KR" altLang="en-US" sz="1200" dirty="0"/>
+              <a:t>각 </a:t>
+            </a:r>
+            <a:r>
+              <a:rPr lang="en-US" altLang="ko-KR" sz="1200" dirty="0"/>
+              <a:t>State</a:t>
+            </a:r>
+            <a:r>
+              <a:rPr lang="ko-KR" altLang="en-US" sz="1200" dirty="0"/>
+              <a:t>들은 </a:t>
+            </a:r>
+            <a:r>
+              <a:rPr lang="en-US" altLang="ko-KR" sz="1200" dirty="0"/>
+              <a:t>State </a:t>
+            </a:r>
+            <a:r>
+              <a:rPr lang="ko-KR" altLang="en-US" sz="1200" dirty="0"/>
+              <a:t>클래스를 상속받아 모든 몬스터가 참조하여 사용할 수 있게 하였다</a:t>
+            </a:r>
+            <a:r>
+              <a:rPr lang="en-US" altLang="ko-KR" sz="1200" dirty="0"/>
+              <a:t>.</a:t>
+            </a:r>
+          </a:p>
+          <a:p>
+            <a:r>
+              <a:rPr lang="en-US" altLang="ko-KR" sz="1200" dirty="0"/>
+              <a:t>(</a:t>
+            </a:r>
+            <a:r>
+              <a:rPr lang="en-US" altLang="ko-KR" sz="1200" dirty="0" err="1"/>
+              <a:t>FSM.h</a:t>
+            </a:r>
+            <a:r>
+              <a:rPr lang="en-US" altLang="ko-KR" sz="1200" dirty="0"/>
+              <a:t>/</a:t>
+            </a:r>
+            <a:r>
+              <a:rPr lang="en-US" altLang="ko-KR" sz="1200" dirty="0" err="1"/>
+              <a:t>cpp</a:t>
+            </a:r>
+            <a:r>
+              <a:rPr lang="en-US" altLang="ko-KR" sz="1200" dirty="0"/>
+              <a:t>, </a:t>
+            </a:r>
+            <a:r>
+              <a:rPr lang="en-US" altLang="ko-KR" sz="1200" dirty="0" err="1"/>
+              <a:t>State.h</a:t>
+            </a:r>
+            <a:r>
+              <a:rPr lang="en-US" altLang="ko-KR" sz="1200" dirty="0"/>
+              <a:t>/</a:t>
+            </a:r>
+            <a:r>
+              <a:rPr lang="en-US" altLang="ko-KR" sz="1200" dirty="0" err="1"/>
+              <a:t>cpp</a:t>
+            </a:r>
+            <a:r>
+              <a:rPr lang="en-US" altLang="ko-KR" sz="1200" dirty="0"/>
+              <a:t> </a:t>
+            </a:r>
+            <a:r>
+              <a:rPr lang="ko-KR" altLang="en-US" sz="1200" dirty="0"/>
+              <a:t>참조</a:t>
+            </a:r>
+            <a:r>
+              <a:rPr lang="en-US" altLang="ko-KR" sz="1200" dirty="0"/>
+              <a:t>)</a:t>
+            </a:r>
+            <a:endParaRPr lang="ko-KR" altLang="en-US" sz="1200" dirty="0"/>
+          </a:p>
+        </p:txBody>
+      </p:sp>
+    </p:spTree>
+    <p:extLst>
+      <p:ext uri="{BB962C8B-B14F-4D97-AF65-F5344CB8AC3E}">
+        <p14:creationId xmlns:p14="http://schemas.microsoft.com/office/powerpoint/2010/main" val="696186562"/>
+      </p:ext>
+    </p:extLst>
+  </p:cSld>
+  <p:clrMapOvr>
+    <a:masterClrMapping/>
+  </p:clrMapOvr>
+</p:sld>
+</file>
+
+<file path=ppt/slides/slide8.xml><?xml version="1.0" encoding="utf-8"?>
+<p:sld xmlns:a="http://schemas.openxmlformats.org/drawingml/2006/main" xmlns:r="http://schemas.openxmlformats.org/officeDocument/2006/relationships" xmlns:p="http://schemas.openxmlformats.org/presentationml/2006/main">
+  <p:cSld>
+    <p:spTree>
+      <p:nvGrpSpPr>
+        <p:cNvPr id="1" name="">
+          <a:extLst>
+            <a:ext uri="{FF2B5EF4-FFF2-40B4-BE49-F238E27FC236}">
+              <a16:creationId xmlns:a16="http://schemas.microsoft.com/office/drawing/2014/main" id="{8E83BEF3-82B2-0C4E-BE48-E5C1E61E26A6}"/>
+            </a:ext>
+          </a:extLst>
+        </p:cNvPr>
+        <p:cNvGrpSpPr/>
+        <p:nvPr/>
+      </p:nvGrpSpPr>
+      <p:grpSpPr>
+        <a:xfrm>
+          <a:off x="0" y="0"/>
+          <a:ext cx="0" cy="0"/>
+          <a:chOff x="0" y="0"/>
+          <a:chExt cx="0" cy="0"/>
+        </a:xfrm>
+      </p:grpSpPr>
+      <p:sp>
+        <p:nvSpPr>
+          <p:cNvPr id="2" name="제목 1">
+            <a:extLst>
+              <a:ext uri="{FF2B5EF4-FFF2-40B4-BE49-F238E27FC236}">
+                <a16:creationId xmlns:a16="http://schemas.microsoft.com/office/drawing/2014/main" id="{3081290B-D8A2-2340-01EB-D0415D00CCFB}"/>
+              </a:ext>
+            </a:extLst>
+          </p:cNvPr>
+          <p:cNvSpPr>
+            <a:spLocks noGrp="1"/>
+          </p:cNvSpPr>
+          <p:nvPr>
+            <p:ph type="title"/>
+          </p:nvPr>
+        </p:nvSpPr>
+        <p:spPr/>
+        <p:txBody>
+          <a:bodyPr/>
+          <a:lstStyle/>
+          <a:p>
+            <a:r>
+              <a:rPr lang="ko-KR" altLang="en-US" dirty="0"/>
+              <a:t>네트워크 게임 프로그래밍</a:t>
+            </a:r>
+          </a:p>
+        </p:txBody>
+      </p:sp>
+      <p:graphicFrame>
+        <p:nvGraphicFramePr>
+          <p:cNvPr id="4" name="표 3">
+            <a:extLst>
+              <a:ext uri="{FF2B5EF4-FFF2-40B4-BE49-F238E27FC236}">
+                <a16:creationId xmlns:a16="http://schemas.microsoft.com/office/drawing/2014/main" id="{DDF35D7B-9F93-2046-0101-479264C261D6}"/>
+              </a:ext>
+            </a:extLst>
+          </p:cNvPr>
+          <p:cNvGraphicFramePr>
+            <a:graphicFrameLocks noGrp="1"/>
+          </p:cNvGraphicFramePr>
+          <p:nvPr>
+            <p:extLst>
+              <p:ext uri="{D42A27DB-BD31-4B8C-83A1-F6EECF244321}">
+                <p14:modId xmlns:p14="http://schemas.microsoft.com/office/powerpoint/2010/main" val="4287472570"/>
+              </p:ext>
+            </p:extLst>
+          </p:nvPr>
+        </p:nvGraphicFramePr>
+        <p:xfrm>
+          <a:off x="3419763" y="1783051"/>
+          <a:ext cx="8128000" cy="3784600"/>
+        </p:xfrm>
+        <a:graphic>
+          <a:graphicData uri="http://schemas.openxmlformats.org/drawingml/2006/table">
+            <a:tbl>
+              <a:tblPr firstRow="1" bandRow="1">
+                <a:tableStyleId>{5940675A-B579-460E-94D1-54222C63F5DA}</a:tableStyleId>
+              </a:tblPr>
+              <a:tblGrid>
+                <a:gridCol w="1810327">
+                  <a:extLst>
+                    <a:ext uri="{9D8B030D-6E8A-4147-A177-3AD203B41FA5}">
+                      <a16:colId xmlns:a16="http://schemas.microsoft.com/office/drawing/2014/main" val="2840878273"/>
+                    </a:ext>
+                  </a:extLst>
+                </a:gridCol>
+                <a:gridCol w="6317673">
+                  <a:extLst>
+                    <a:ext uri="{9D8B030D-6E8A-4147-A177-3AD203B41FA5}">
+                      <a16:colId xmlns:a16="http://schemas.microsoft.com/office/drawing/2014/main" val="3983066521"/>
+                    </a:ext>
+                  </a:extLst>
+                </a:gridCol>
+              </a:tblGrid>
+              <a:tr h="370840">
+                <a:tc>
+                  <a:txBody>
+                    <a:bodyPr/>
+                    <a:lstStyle/>
+                    <a:p>
+                      <a:pPr latinLnBrk="1"/>
+                      <a:r>
+                        <a:rPr lang="ko-KR" altLang="en-US" dirty="0" err="1"/>
+                        <a:t>게임명</a:t>
+                      </a:r>
+                      <a:endParaRPr lang="ko-KR" altLang="en-US" dirty="0"/>
+                    </a:p>
+                  </a:txBody>
+                  <a:tcPr/>
+                </a:tc>
+                <a:tc>
+                  <a:txBody>
+                    <a:bodyPr/>
+                    <a:lstStyle/>
+                    <a:p>
+                      <a:pPr latinLnBrk="1"/>
+                      <a:r>
+                        <a:rPr lang="ko-KR" altLang="en-US" dirty="0"/>
+                        <a:t>대초원의 모험</a:t>
+                      </a:r>
+                    </a:p>
+                  </a:txBody>
+                  <a:tcPr/>
+                </a:tc>
+                <a:extLst>
+                  <a:ext uri="{0D108BD9-81ED-4DB2-BD59-A6C34878D82A}">
+                    <a16:rowId xmlns:a16="http://schemas.microsoft.com/office/drawing/2014/main" val="3765676126"/>
+                  </a:ext>
+                </a:extLst>
+              </a:tr>
+              <a:tr h="370840">
+                <a:tc>
+                  <a:txBody>
+                    <a:bodyPr/>
+                    <a:lstStyle/>
+                    <a:p>
+                      <a:pPr latinLnBrk="1"/>
+                      <a:r>
+                        <a:rPr lang="ko-KR" altLang="en-US" dirty="0"/>
+                        <a:t>게임 장르</a:t>
+                      </a:r>
+                    </a:p>
+                  </a:txBody>
+                  <a:tcPr/>
+                </a:tc>
+                <a:tc>
+                  <a:txBody>
+                    <a:bodyPr/>
+                    <a:lstStyle/>
+                    <a:p>
+                      <a:pPr latinLnBrk="1"/>
+                      <a:r>
+                        <a:rPr lang="ko-KR" altLang="en-US" dirty="0"/>
+                        <a:t>아케이드 슈팅</a:t>
+                      </a:r>
+                    </a:p>
+                  </a:txBody>
+                  <a:tcPr/>
+                </a:tc>
+                <a:extLst>
+                  <a:ext uri="{0D108BD9-81ED-4DB2-BD59-A6C34878D82A}">
+                    <a16:rowId xmlns:a16="http://schemas.microsoft.com/office/drawing/2014/main" val="3710180039"/>
+                  </a:ext>
+                </a:extLst>
+              </a:tr>
+              <a:tr h="370840">
+                <a:tc>
+                  <a:txBody>
+                    <a:bodyPr/>
+                    <a:lstStyle/>
+                    <a:p>
+                      <a:pPr latinLnBrk="1"/>
+                      <a:r>
+                        <a:rPr lang="ko-KR" altLang="en-US" dirty="0"/>
+                        <a:t>개발 기간</a:t>
+                      </a:r>
+                    </a:p>
+                  </a:txBody>
+                  <a:tcPr/>
+                </a:tc>
+                <a:tc>
+                  <a:txBody>
+                    <a:bodyPr/>
+                    <a:lstStyle/>
+                    <a:p>
+                      <a:pPr latinLnBrk="1"/>
+                      <a:r>
+                        <a:rPr lang="en-US" altLang="ko-KR" dirty="0"/>
+                        <a:t>2025.10~2025.12</a:t>
+                      </a:r>
+                    </a:p>
+                  </a:txBody>
+                  <a:tcPr/>
+                </a:tc>
+                <a:extLst>
+                  <a:ext uri="{0D108BD9-81ED-4DB2-BD59-A6C34878D82A}">
+                    <a16:rowId xmlns:a16="http://schemas.microsoft.com/office/drawing/2014/main" val="3177747095"/>
+                  </a:ext>
+                </a:extLst>
+              </a:tr>
+              <a:tr h="370840">
+                <a:tc>
+                  <a:txBody>
+                    <a:bodyPr/>
+                    <a:lstStyle/>
+                    <a:p>
+                      <a:pPr latinLnBrk="1"/>
+                      <a:r>
+                        <a:rPr lang="ko-KR" altLang="en-US" dirty="0"/>
+                        <a:t>개발 인원</a:t>
+                      </a:r>
+                    </a:p>
+                  </a:txBody>
+                  <a:tcPr/>
+                </a:tc>
+                <a:tc>
+                  <a:txBody>
+                    <a:bodyPr/>
+                    <a:lstStyle/>
+                    <a:p>
+                      <a:pPr latinLnBrk="1"/>
+                      <a:r>
+                        <a:rPr lang="en-US" altLang="ko-KR" dirty="0"/>
+                        <a:t>3</a:t>
+                      </a:r>
+                      <a:endParaRPr lang="ko-KR" altLang="en-US" dirty="0"/>
+                    </a:p>
+                  </a:txBody>
+                  <a:tcPr/>
+                </a:tc>
+                <a:extLst>
+                  <a:ext uri="{0D108BD9-81ED-4DB2-BD59-A6C34878D82A}">
+                    <a16:rowId xmlns:a16="http://schemas.microsoft.com/office/drawing/2014/main" val="2034956738"/>
+                  </a:ext>
+                </a:extLst>
+              </a:tr>
+              <a:tr h="370840">
+                <a:tc>
+                  <a:txBody>
+                    <a:bodyPr/>
+                    <a:lstStyle/>
+                    <a:p>
+                      <a:pPr latinLnBrk="1"/>
+                      <a:r>
+                        <a:rPr lang="ko-KR" altLang="en-US" dirty="0"/>
+                        <a:t>사용 기술</a:t>
+                      </a:r>
+                    </a:p>
+                  </a:txBody>
+                  <a:tcPr/>
+                </a:tc>
+                <a:tc>
+                  <a:txBody>
+                    <a:bodyPr/>
+                    <a:lstStyle/>
+                    <a:p>
+                      <a:pPr latinLnBrk="1"/>
+                      <a:r>
+                        <a:rPr lang="en-US" altLang="ko-KR" dirty="0"/>
+                        <a:t>C++20, Select</a:t>
+                      </a:r>
+                      <a:endParaRPr lang="ko-KR" altLang="en-US" dirty="0"/>
+                    </a:p>
+                  </a:txBody>
+                  <a:tcPr/>
+                </a:tc>
+                <a:extLst>
+                  <a:ext uri="{0D108BD9-81ED-4DB2-BD59-A6C34878D82A}">
+                    <a16:rowId xmlns:a16="http://schemas.microsoft.com/office/drawing/2014/main" val="2342659492"/>
+                  </a:ext>
+                </a:extLst>
+              </a:tr>
+              <a:tr h="370840">
+                <a:tc>
+                  <a:txBody>
+                    <a:bodyPr/>
+                    <a:lstStyle/>
+                    <a:p>
+                      <a:pPr latinLnBrk="1"/>
+                      <a:r>
+                        <a:rPr lang="ko-KR" altLang="en-US" dirty="0"/>
+                        <a:t>역할 및 구현 내용</a:t>
+                      </a:r>
+                    </a:p>
+                  </a:txBody>
+                  <a:tcPr/>
+                </a:tc>
+                <a:tc>
+                  <a:txBody>
+                    <a:bodyPr/>
+                    <a:lstStyle/>
+                    <a:p>
+                      <a:pPr latinLnBrk="1"/>
+                      <a:r>
+                        <a:rPr lang="en-US" altLang="ko-KR" dirty="0"/>
+                        <a:t>-</a:t>
+                      </a:r>
+                      <a:r>
+                        <a:rPr lang="ko-KR" altLang="en-US" dirty="0"/>
+                        <a:t>서버 프레임워크 구축</a:t>
+                      </a:r>
+                      <a:endParaRPr lang="en-US" altLang="ko-KR" dirty="0"/>
+                    </a:p>
+                    <a:p>
+                      <a:pPr latinLnBrk="1"/>
+                      <a:r>
+                        <a:rPr lang="en-US" altLang="ko-KR" dirty="0"/>
+                        <a:t>-</a:t>
+                      </a:r>
+                      <a:r>
+                        <a:rPr lang="ko-KR" altLang="en-US" dirty="0"/>
+                        <a:t>클라이언트</a:t>
+                      </a:r>
+                      <a:r>
+                        <a:rPr lang="en-US" altLang="ko-KR" dirty="0"/>
+                        <a:t>/</a:t>
+                      </a:r>
+                      <a:r>
+                        <a:rPr lang="ko-KR" altLang="en-US" dirty="0"/>
+                        <a:t>서버 패킷 송수신 로직</a:t>
+                      </a:r>
+                      <a:endParaRPr lang="en-US" altLang="ko-KR" dirty="0"/>
+                    </a:p>
+                    <a:p>
+                      <a:pPr marL="0" marR="0" lvl="0" indent="0" algn="l" defTabSz="914400" rtl="0" eaLnBrk="1" fontAlgn="auto" latinLnBrk="1" hangingPunct="1">
+                        <a:lnSpc>
+                          <a:spcPct val="100000"/>
+                        </a:lnSpc>
+                        <a:spcBef>
+                          <a:spcPts val="0"/>
+                        </a:spcBef>
+                        <a:spcAft>
+                          <a:spcPts val="0"/>
+                        </a:spcAft>
+                        <a:buClrTx/>
+                        <a:buSzTx/>
+                        <a:buFontTx/>
+                        <a:buNone/>
+                        <a:tabLst/>
+                        <a:defRPr/>
+                      </a:pPr>
+                      <a:r>
+                        <a:rPr lang="en-US" altLang="ko-KR" dirty="0"/>
+                        <a:t>-</a:t>
+                      </a:r>
+                      <a:r>
+                        <a:rPr lang="ko-KR" altLang="en-US" dirty="0"/>
+                        <a:t>프로토콜 및 패킷 설계</a:t>
+                      </a:r>
+                      <a:endParaRPr lang="en-US" altLang="ko-KR" dirty="0"/>
+                    </a:p>
+                    <a:p>
+                      <a:pPr latinLnBrk="1"/>
+                      <a:r>
+                        <a:rPr lang="en-US" altLang="ko-KR" dirty="0"/>
+                        <a:t>-</a:t>
+                      </a:r>
+                      <a:r>
+                        <a:rPr lang="ko-KR" altLang="en-US" dirty="0"/>
+                        <a:t>플레이어 이동</a:t>
+                      </a:r>
+                      <a:r>
+                        <a:rPr lang="en-US" altLang="ko-KR" dirty="0"/>
+                        <a:t>, </a:t>
+                      </a:r>
+                      <a:r>
+                        <a:rPr lang="ko-KR" altLang="en-US" dirty="0"/>
+                        <a:t>방향</a:t>
+                      </a:r>
+                      <a:r>
+                        <a:rPr lang="en-US" altLang="ko-KR" dirty="0"/>
+                        <a:t>, State </a:t>
+                      </a:r>
+                      <a:r>
+                        <a:rPr lang="ko-KR" altLang="en-US" dirty="0"/>
+                        <a:t>등 각종 동기화 작업</a:t>
+                      </a:r>
+                      <a:endParaRPr lang="en-US" altLang="ko-KR" dirty="0"/>
+                    </a:p>
+                  </a:txBody>
+                  <a:tcPr/>
+                </a:tc>
+                <a:extLst>
+                  <a:ext uri="{0D108BD9-81ED-4DB2-BD59-A6C34878D82A}">
+                    <a16:rowId xmlns:a16="http://schemas.microsoft.com/office/drawing/2014/main" val="4289478093"/>
+                  </a:ext>
+                </a:extLst>
+              </a:tr>
+              <a:tr h="370840">
+                <a:tc>
+                  <a:txBody>
+                    <a:bodyPr/>
+                    <a:lstStyle/>
+                    <a:p>
+                      <a:pPr latinLnBrk="1"/>
+                      <a:r>
+                        <a:rPr lang="en-US" altLang="ko-KR" dirty="0"/>
+                        <a:t>Git</a:t>
+                      </a:r>
+                      <a:endParaRPr lang="ko-KR" altLang="en-US" dirty="0"/>
+                    </a:p>
+                  </a:txBody>
+                  <a:tcPr/>
+                </a:tc>
+                <a:tc>
+                  <a:txBody>
+                    <a:bodyPr/>
+                    <a:lstStyle/>
+                    <a:p>
+                      <a:pPr latinLnBrk="1"/>
+                      <a:r>
+                        <a:rPr lang="en-US" altLang="ko-KR" dirty="0">
+                          <a:hlinkClick r:id="rId2"/>
+                        </a:rPr>
+                        <a:t>https://github.com/kimi5231/NGP_project.git</a:t>
+                      </a:r>
+                      <a:endParaRPr lang="en-US" altLang="ko-KR" dirty="0"/>
+                    </a:p>
+                  </a:txBody>
+                  <a:tcPr/>
+                </a:tc>
+                <a:extLst>
+                  <a:ext uri="{0D108BD9-81ED-4DB2-BD59-A6C34878D82A}">
+                    <a16:rowId xmlns:a16="http://schemas.microsoft.com/office/drawing/2014/main" val="2634139248"/>
+                  </a:ext>
+                </a:extLst>
+              </a:tr>
+              <a:tr h="370840">
+                <a:tc>
+                  <a:txBody>
+                    <a:bodyPr/>
+                    <a:lstStyle/>
+                    <a:p>
+                      <a:pPr latinLnBrk="1"/>
+                      <a:r>
+                        <a:rPr lang="ko-KR" altLang="en-US" dirty="0"/>
+                        <a:t>시연 영상</a:t>
+                      </a:r>
+                    </a:p>
+                  </a:txBody>
+                  <a:tcPr/>
+                </a:tc>
+                <a:tc>
+                  <a:txBody>
+                    <a:bodyPr/>
+                    <a:lstStyle/>
+                    <a:p>
+                      <a:pPr latinLnBrk="1"/>
+                      <a:r>
+                        <a:rPr lang="ko-KR" altLang="en-US" dirty="0"/>
+                        <a:t>제작 필요</a:t>
+                      </a:r>
+                    </a:p>
+                  </a:txBody>
+                  <a:tcPr/>
+                </a:tc>
+                <a:extLst>
+                  <a:ext uri="{0D108BD9-81ED-4DB2-BD59-A6C34878D82A}">
+                    <a16:rowId xmlns:a16="http://schemas.microsoft.com/office/drawing/2014/main" val="2941132060"/>
+                  </a:ext>
+                </a:extLst>
+              </a:tr>
+            </a:tbl>
+          </a:graphicData>
+        </a:graphic>
+      </p:graphicFrame>
+    </p:spTree>
+    <p:extLst>
+      <p:ext uri="{BB962C8B-B14F-4D97-AF65-F5344CB8AC3E}">
+        <p14:creationId xmlns:p14="http://schemas.microsoft.com/office/powerpoint/2010/main" val="3713706586"/>
+      </p:ext>
+    </p:extLst>
+  </p:cSld>
+  <p:clrMapOvr>
+    <a:masterClrMapping/>
+  </p:clrMapOvr>
+</p:sld>
+</file>
+
+<file path=ppt/slides/slide9.xml><?xml version="1.0" encoding="utf-8"?>
 <p:sld xmlns:a="http://schemas.openxmlformats.org/drawingml/2006/main" xmlns:r="http://schemas.openxmlformats.org/officeDocument/2006/relationships" xmlns:p="http://schemas.openxmlformats.org/presentationml/2006/main">
   <p:cSld>
     <p:spTree>
